--- a/overview.pptx
+++ b/overview.pptx
@@ -261,7 +261,7 @@
           <a:p>
             <a:fld id="{87F22E27-1CF1-49AC-AEA9-BB4CAC94086F}" type="datetimeFigureOut">
               <a:rPr lang="en-CA" smtClean="0"/>
-              <a:t>2025-11-13</a:t>
+              <a:t>2026-07-20</a:t>
             </a:fld>
             <a:endParaRPr lang="en-CA"/>
           </a:p>
@@ -461,7 +461,7 @@
           <a:p>
             <a:fld id="{87F22E27-1CF1-49AC-AEA9-BB4CAC94086F}" type="datetimeFigureOut">
               <a:rPr lang="en-CA" smtClean="0"/>
-              <a:t>2025-11-13</a:t>
+              <a:t>2026-07-20</a:t>
             </a:fld>
             <a:endParaRPr lang="en-CA"/>
           </a:p>
@@ -671,7 +671,7 @@
           <a:p>
             <a:fld id="{87F22E27-1CF1-49AC-AEA9-BB4CAC94086F}" type="datetimeFigureOut">
               <a:rPr lang="en-CA" smtClean="0"/>
-              <a:t>2025-11-13</a:t>
+              <a:t>2026-07-20</a:t>
             </a:fld>
             <a:endParaRPr lang="en-CA"/>
           </a:p>
@@ -871,7 +871,7 @@
           <a:p>
             <a:fld id="{87F22E27-1CF1-49AC-AEA9-BB4CAC94086F}" type="datetimeFigureOut">
               <a:rPr lang="en-CA" smtClean="0"/>
-              <a:t>2025-11-13</a:t>
+              <a:t>2026-07-20</a:t>
             </a:fld>
             <a:endParaRPr lang="en-CA"/>
           </a:p>
@@ -1147,7 +1147,7 @@
           <a:p>
             <a:fld id="{87F22E27-1CF1-49AC-AEA9-BB4CAC94086F}" type="datetimeFigureOut">
               <a:rPr lang="en-CA" smtClean="0"/>
-              <a:t>2025-11-13</a:t>
+              <a:t>2026-07-20</a:t>
             </a:fld>
             <a:endParaRPr lang="en-CA"/>
           </a:p>
@@ -1415,7 +1415,7 @@
           <a:p>
             <a:fld id="{87F22E27-1CF1-49AC-AEA9-BB4CAC94086F}" type="datetimeFigureOut">
               <a:rPr lang="en-CA" smtClean="0"/>
-              <a:t>2025-11-13</a:t>
+              <a:t>2026-07-20</a:t>
             </a:fld>
             <a:endParaRPr lang="en-CA"/>
           </a:p>
@@ -1830,7 +1830,7 @@
           <a:p>
             <a:fld id="{87F22E27-1CF1-49AC-AEA9-BB4CAC94086F}" type="datetimeFigureOut">
               <a:rPr lang="en-CA" smtClean="0"/>
-              <a:t>2025-11-13</a:t>
+              <a:t>2026-07-20</a:t>
             </a:fld>
             <a:endParaRPr lang="en-CA"/>
           </a:p>
@@ -1972,7 +1972,7 @@
           <a:p>
             <a:fld id="{87F22E27-1CF1-49AC-AEA9-BB4CAC94086F}" type="datetimeFigureOut">
               <a:rPr lang="en-CA" smtClean="0"/>
-              <a:t>2025-11-13</a:t>
+              <a:t>2026-07-20</a:t>
             </a:fld>
             <a:endParaRPr lang="en-CA"/>
           </a:p>
@@ -2085,7 +2085,7 @@
           <a:p>
             <a:fld id="{87F22E27-1CF1-49AC-AEA9-BB4CAC94086F}" type="datetimeFigureOut">
               <a:rPr lang="en-CA" smtClean="0"/>
-              <a:t>2025-11-13</a:t>
+              <a:t>2026-07-20</a:t>
             </a:fld>
             <a:endParaRPr lang="en-CA"/>
           </a:p>
@@ -2398,7 +2398,7 @@
           <a:p>
             <a:fld id="{87F22E27-1CF1-49AC-AEA9-BB4CAC94086F}" type="datetimeFigureOut">
               <a:rPr lang="en-CA" smtClean="0"/>
-              <a:t>2025-11-13</a:t>
+              <a:t>2026-07-20</a:t>
             </a:fld>
             <a:endParaRPr lang="en-CA"/>
           </a:p>
@@ -2687,7 +2687,7 @@
           <a:p>
             <a:fld id="{87F22E27-1CF1-49AC-AEA9-BB4CAC94086F}" type="datetimeFigureOut">
               <a:rPr lang="en-CA" smtClean="0"/>
-              <a:t>2025-11-13</a:t>
+              <a:t>2026-07-20</a:t>
             </a:fld>
             <a:endParaRPr lang="en-CA"/>
           </a:p>
@@ -2930,7 +2930,7 @@
           <a:p>
             <a:fld id="{87F22E27-1CF1-49AC-AEA9-BB4CAC94086F}" type="datetimeFigureOut">
               <a:rPr lang="en-CA" smtClean="0"/>
-              <a:t>2025-11-13</a:t>
+              <a:t>2026-07-20</a:t>
             </a:fld>
             <a:endParaRPr lang="en-CA"/>
           </a:p>
@@ -3361,7 +3361,7 @@
         </p:nvSpPr>
         <p:spPr>
           <a:xfrm>
-            <a:off x="3991638" y="-1624634"/>
+            <a:off x="3886707" y="-1999388"/>
             <a:ext cx="2231334" cy="402487"/>
           </a:xfrm>
           <a:prstGeom prst="roundRect">
@@ -3430,7 +3430,7 @@
         </p:nvCxnSpPr>
         <p:spPr>
           <a:xfrm>
-            <a:off x="5107305" y="-1222147"/>
+            <a:off x="5002374" y="-1596901"/>
             <a:ext cx="8073" cy="310998"/>
           </a:xfrm>
           <a:prstGeom prst="straightConnector1">
@@ -3474,7 +3474,7 @@
         </p:nvSpPr>
         <p:spPr>
           <a:xfrm>
-            <a:off x="4167708" y="-911149"/>
+            <a:off x="4062777" y="-1285903"/>
             <a:ext cx="1895340" cy="317161"/>
           </a:xfrm>
           <a:prstGeom prst="roundRect">
@@ -3537,7 +3537,7 @@
         </p:nvSpPr>
         <p:spPr>
           <a:xfrm>
-            <a:off x="2812274" y="41772"/>
+            <a:off x="2707343" y="-332982"/>
             <a:ext cx="1664044" cy="320781"/>
           </a:xfrm>
           <a:prstGeom prst="roundRect">
@@ -3600,7 +3600,7 @@
         </p:nvSpPr>
         <p:spPr>
           <a:xfrm>
-            <a:off x="5499077" y="-194973"/>
+            <a:off x="7394023" y="1233645"/>
             <a:ext cx="2175331" cy="844414"/>
           </a:xfrm>
           <a:prstGeom prst="roundRect">
@@ -3643,7 +3643,7 @@
                   <a:schemeClr val="tx1"/>
                 </a:solidFill>
               </a:rPr>
-              <a:t>Upload spatial dataset:</a:t>
+              <a:t>Upload spatial data:</a:t>
             </a:r>
           </a:p>
           <a:p>
@@ -3703,18 +3703,18 @@
           <p:cNvCxnSpPr>
             <a:cxnSpLocks/>
             <a:stCxn id="8" idx="2"/>
-            <a:endCxn id="10" idx="0"/>
+            <a:endCxn id="5" idx="0"/>
           </p:cNvCxnSpPr>
           <p:nvPr/>
         </p:nvCxnSpPr>
         <p:spPr>
           <a:xfrm rot="16200000" flipH="1">
-            <a:off x="5651553" y="-1130164"/>
-            <a:ext cx="399015" cy="1471365"/>
+            <a:off x="5250825" y="-1209120"/>
+            <a:ext cx="632606" cy="1113362"/>
           </a:xfrm>
           <a:prstGeom prst="bentConnector3">
             <a:avLst>
-              <a:gd name="adj1" fmla="val 47917"/>
+              <a:gd name="adj1" fmla="val 31209"/>
             </a:avLst>
           </a:prstGeom>
           <a:ln>
@@ -3759,7 +3759,7 @@
         </p:nvCxnSpPr>
         <p:spPr>
           <a:xfrm rot="5400000">
-            <a:off x="4061957" y="-1011649"/>
+            <a:off x="3957026" y="-1386403"/>
             <a:ext cx="635760" cy="1471082"/>
           </a:xfrm>
           <a:prstGeom prst="bentConnector3">
@@ -3791,88 +3791,6 @@
           </a:fontRef>
         </p:style>
       </p:cxnSp>
-      <p:sp>
-        <p:nvSpPr>
-          <p:cNvPr id="15" name="Rectangle : coins arrondis 14">
-            <a:extLst>
-              <a:ext uri="{FF2B5EF4-FFF2-40B4-BE49-F238E27FC236}">
-                <a16:creationId xmlns:a16="http://schemas.microsoft.com/office/drawing/2014/main" id="{9D262B52-2927-6D20-C257-4DAD2C407583}"/>
-              </a:ext>
-            </a:extLst>
-          </p:cNvPr>
-          <p:cNvSpPr/>
-          <p:nvPr/>
-        </p:nvSpPr>
-        <p:spPr>
-          <a:xfrm>
-            <a:off x="3945457" y="979023"/>
-            <a:ext cx="2277515" cy="480727"/>
-          </a:xfrm>
-          <a:prstGeom prst="roundRect">
-            <a:avLst/>
-          </a:prstGeom>
-          <a:solidFill>
-            <a:schemeClr val="accent5">
-              <a:lumMod val="40000"/>
-              <a:lumOff val="60000"/>
-            </a:schemeClr>
-          </a:solidFill>
-          <a:ln>
-            <a:solidFill>
-              <a:schemeClr val="accent2">
-                <a:lumMod val="50000"/>
-              </a:schemeClr>
-            </a:solidFill>
-          </a:ln>
-        </p:spPr>
-        <p:style>
-          <a:lnRef idx="2">
-            <a:schemeClr val="accent1">
-              <a:shade val="15000"/>
-            </a:schemeClr>
-          </a:lnRef>
-          <a:fillRef idx="1">
-            <a:schemeClr val="accent1"/>
-          </a:fillRef>
-          <a:effectRef idx="0">
-            <a:schemeClr val="accent1"/>
-          </a:effectRef>
-          <a:fontRef idx="minor">
-            <a:schemeClr val="lt1"/>
-          </a:fontRef>
-        </p:style>
-        <p:txBody>
-          <a:bodyPr rtlCol="0" anchor="ctr"/>
-          <a:lstStyle/>
-          <a:p>
-            <a:pPr algn="ctr"/>
-            <a:r>
-              <a:rPr lang="en-CA" sz="1200" dirty="0">
-                <a:solidFill>
-                  <a:schemeClr val="tx1"/>
-                </a:solidFill>
-              </a:rPr>
-              <a:t>Upload </a:t>
-            </a:r>
-            <a:r>
-              <a:rPr lang="en-CA" sz="1200" dirty="0" err="1">
-                <a:solidFill>
-                  <a:schemeClr val="tx1"/>
-                </a:solidFill>
-              </a:rPr>
-              <a:t>GeoPackage</a:t>
-            </a:r>
-            <a:r>
-              <a:rPr lang="en-CA" sz="1200" dirty="0">
-                <a:solidFill>
-                  <a:schemeClr val="tx1"/>
-                </a:solidFill>
-              </a:rPr>
-              <a:t> from Disturbance Explorer (optional)</a:t>
-            </a:r>
-          </a:p>
-        </p:txBody>
-      </p:sp>
       <p:cxnSp>
         <p:nvCxnSpPr>
           <p:cNvPr id="16" name="Connecteur : en angle 15">
@@ -3885,18 +3803,18 @@
           <p:cNvCxnSpPr>
             <a:cxnSpLocks/>
             <a:stCxn id="9" idx="2"/>
-            <a:endCxn id="15" idx="0"/>
+            <a:endCxn id="78" idx="0"/>
           </p:cNvCxnSpPr>
           <p:nvPr/>
         </p:nvCxnSpPr>
         <p:spPr>
           <a:xfrm rot="16200000" flipH="1">
-            <a:off x="4056020" y="-49172"/>
-            <a:ext cx="616470" cy="1439919"/>
+            <a:off x="2354079" y="1173084"/>
+            <a:ext cx="3808510" cy="1437939"/>
           </a:xfrm>
           <a:prstGeom prst="bentConnector3">
             <a:avLst>
-              <a:gd name="adj1" fmla="val 71575"/>
+              <a:gd name="adj1" fmla="val 77371"/>
             </a:avLst>
           </a:prstGeom>
           <a:ln>
@@ -3937,7 +3855,7 @@
         </p:nvSpPr>
         <p:spPr>
           <a:xfrm>
-            <a:off x="4250213" y="4502036"/>
+            <a:off x="4145282" y="6632738"/>
             <a:ext cx="1664044" cy="360512"/>
           </a:xfrm>
           <a:prstGeom prst="roundRect">
@@ -4000,7 +3918,7 @@
         </p:nvSpPr>
         <p:spPr>
           <a:xfrm>
-            <a:off x="5563560" y="5555628"/>
+            <a:off x="5458629" y="7686330"/>
             <a:ext cx="1719861" cy="398790"/>
           </a:xfrm>
           <a:prstGeom prst="roundRect">
@@ -4063,7 +3981,7 @@
         </p:nvSpPr>
         <p:spPr>
           <a:xfrm>
-            <a:off x="3022112" y="5828230"/>
+            <a:off x="2917181" y="7958932"/>
             <a:ext cx="1664044" cy="591538"/>
           </a:xfrm>
           <a:prstGeom prst="roundRect">
@@ -4127,14 +4045,14 @@
           <p:cNvCxnSpPr>
             <a:cxnSpLocks/>
             <a:stCxn id="78" idx="2"/>
-            <a:endCxn id="99" idx="0"/>
+            <a:endCxn id="104" idx="0"/>
           </p:cNvCxnSpPr>
           <p:nvPr/>
         </p:nvCxnSpPr>
         <p:spPr>
           <a:xfrm rot="16200000" flipH="1">
-            <a:off x="4982175" y="2747450"/>
-            <a:ext cx="202217" cy="2096"/>
+            <a:off x="4815003" y="4823430"/>
+            <a:ext cx="337136" cy="12535"/>
           </a:xfrm>
           <a:prstGeom prst="bentConnector3">
             <a:avLst/>
@@ -4174,15 +4092,14 @@
           </p:cNvPr>
           <p:cNvCxnSpPr>
             <a:cxnSpLocks/>
-            <a:stCxn id="104" idx="2"/>
             <a:endCxn id="18" idx="0"/>
           </p:cNvCxnSpPr>
           <p:nvPr/>
         </p:nvCxnSpPr>
         <p:spPr>
           <a:xfrm rot="5400000">
-            <a:off x="4941600" y="4358242"/>
-            <a:ext cx="284429" cy="3158"/>
+            <a:off x="4790446" y="6420809"/>
+            <a:ext cx="398787" cy="25070"/>
           </a:xfrm>
           <a:prstGeom prst="bentConnector3">
             <a:avLst>
@@ -4231,7 +4148,7 @@
         </p:nvCxnSpPr>
         <p:spPr>
           <a:xfrm rot="16200000" flipH="1">
-            <a:off x="5406323" y="4538460"/>
+            <a:off x="5301392" y="6669162"/>
             <a:ext cx="693080" cy="1341256"/>
           </a:xfrm>
           <a:prstGeom prst="bentConnector3">
@@ -4277,7 +4194,7 @@
         </p:nvSpPr>
         <p:spPr>
           <a:xfrm>
-            <a:off x="3578752" y="7580444"/>
+            <a:off x="3473821" y="9711146"/>
             <a:ext cx="3106890" cy="576649"/>
           </a:xfrm>
           <a:prstGeom prst="roundRect">
@@ -4357,7 +4274,7 @@
         </p:nvCxnSpPr>
         <p:spPr>
           <a:xfrm>
-            <a:off x="5129913" y="7300884"/>
+            <a:off x="5024982" y="9431586"/>
             <a:ext cx="2284" cy="279560"/>
           </a:xfrm>
           <a:prstGeom prst="straightConnector1">
@@ -4399,17 +4316,19 @@
           <p:cNvCxnSpPr>
             <a:cxnSpLocks/>
             <a:stCxn id="10" idx="2"/>
-            <a:endCxn id="15" idx="0"/>
+            <a:endCxn id="78" idx="0"/>
           </p:cNvCxnSpPr>
           <p:nvPr/>
         </p:nvCxnSpPr>
         <p:spPr>
           <a:xfrm rot="5400000">
-            <a:off x="5670688" y="62968"/>
-            <a:ext cx="329582" cy="1502528"/>
+            <a:off x="5870372" y="1184992"/>
+            <a:ext cx="1718250" cy="3504385"/>
           </a:xfrm>
           <a:prstGeom prst="bentConnector3">
-            <a:avLst/>
+            <a:avLst>
+              <a:gd name="adj1" fmla="val 50000"/>
+            </a:avLst>
           </a:prstGeom>
           <a:ln>
             <a:solidFill>
@@ -4449,7 +4368,7 @@
         </p:nvSpPr>
         <p:spPr>
           <a:xfrm>
-            <a:off x="4036854" y="6741694"/>
+            <a:off x="3931923" y="8872396"/>
             <a:ext cx="2186118" cy="559190"/>
           </a:xfrm>
           <a:prstGeom prst="roundRect">
@@ -4518,7 +4437,7 @@
         </p:nvCxnSpPr>
         <p:spPr>
           <a:xfrm rot="16200000" flipH="1">
-            <a:off x="4331060" y="5942841"/>
+            <a:off x="4226129" y="8073543"/>
             <a:ext cx="321926" cy="1275779"/>
           </a:xfrm>
           <a:prstGeom prst="bentConnector3">
@@ -4568,7 +4487,7 @@
         </p:nvCxnSpPr>
         <p:spPr>
           <a:xfrm rot="5400000">
-            <a:off x="5383064" y="5701267"/>
+            <a:off x="5278133" y="7831969"/>
             <a:ext cx="787276" cy="1293578"/>
           </a:xfrm>
           <a:prstGeom prst="bentConnector3">
@@ -4614,7 +4533,7 @@
         </p:nvSpPr>
         <p:spPr>
           <a:xfrm>
-            <a:off x="3931351" y="1782569"/>
+            <a:off x="3826420" y="3796309"/>
             <a:ext cx="2301768" cy="864821"/>
           </a:xfrm>
           <a:prstGeom prst="roundRect">
@@ -4692,54 +4611,6 @@
           </a:p>
         </p:txBody>
       </p:sp>
-      <p:cxnSp>
-        <p:nvCxnSpPr>
-          <p:cNvPr id="82" name="Connecteur droit avec flèche 81">
-            <a:extLst>
-              <a:ext uri="{FF2B5EF4-FFF2-40B4-BE49-F238E27FC236}">
-                <a16:creationId xmlns:a16="http://schemas.microsoft.com/office/drawing/2014/main" id="{2C82843A-6194-3C84-C7D3-1E280EDBABE6}"/>
-              </a:ext>
-            </a:extLst>
-          </p:cNvPr>
-          <p:cNvCxnSpPr>
-            <a:cxnSpLocks/>
-            <a:stCxn id="15" idx="2"/>
-            <a:endCxn id="78" idx="0"/>
-          </p:cNvCxnSpPr>
-          <p:nvPr/>
-        </p:nvCxnSpPr>
-        <p:spPr>
-          <a:xfrm flipH="1">
-            <a:off x="5082235" y="1459750"/>
-            <a:ext cx="1980" cy="322819"/>
-          </a:xfrm>
-          <a:prstGeom prst="straightConnector1">
-            <a:avLst/>
-          </a:prstGeom>
-          <a:ln>
-            <a:solidFill>
-              <a:schemeClr val="accent2">
-                <a:lumMod val="50000"/>
-              </a:schemeClr>
-            </a:solidFill>
-            <a:tailEnd type="triangle"/>
-          </a:ln>
-        </p:spPr>
-        <p:style>
-          <a:lnRef idx="2">
-            <a:schemeClr val="accent1"/>
-          </a:lnRef>
-          <a:fillRef idx="0">
-            <a:schemeClr val="accent1"/>
-          </a:fillRef>
-          <a:effectRef idx="1">
-            <a:schemeClr val="accent1"/>
-          </a:effectRef>
-          <a:fontRef idx="minor">
-            <a:schemeClr val="tx1"/>
-          </a:fontRef>
-        </p:style>
-      </p:cxnSp>
       <p:sp>
         <p:nvSpPr>
           <p:cNvPr id="99" name="Rectangle : coins arrondis 98">
@@ -4754,8 +4625,8 @@
         </p:nvSpPr>
         <p:spPr>
           <a:xfrm>
-            <a:off x="3933447" y="2849607"/>
-            <a:ext cx="2301768" cy="730881"/>
+            <a:off x="3831455" y="5592755"/>
+            <a:ext cx="2300400" cy="852167"/>
           </a:xfrm>
           <a:prstGeom prst="roundRect">
             <a:avLst/>
@@ -4800,7 +4671,7 @@
                   <a:schemeClr val="tx1"/>
                 </a:solidFill>
               </a:rPr>
-              <a:t>Set source for fire (optional):</a:t>
+              <a:t>Add feature to track (optional):</a:t>
             </a:r>
           </a:p>
           <a:p>
@@ -4820,7 +4691,7 @@
                   <a:schemeClr val="tx1"/>
                 </a:solidFill>
               </a:rPr>
-              <a:t>- Upload fire layer</a:t>
+              <a:t>- Upload a feature layer</a:t>
             </a:r>
           </a:p>
         </p:txBody>
@@ -4836,18 +4707,20 @@
           </p:cNvPr>
           <p:cNvCxnSpPr>
             <a:cxnSpLocks/>
-            <a:stCxn id="99" idx="2"/>
-            <a:endCxn id="104" idx="0"/>
+            <a:stCxn id="104" idx="2"/>
+            <a:endCxn id="99" idx="0"/>
           </p:cNvCxnSpPr>
           <p:nvPr/>
         </p:nvCxnSpPr>
         <p:spPr>
-          <a:xfrm rot="16200000" flipH="1">
-            <a:off x="4988356" y="3676463"/>
-            <a:ext cx="193012" cy="1062"/>
+          <a:xfrm rot="5400000">
+            <a:off x="4910556" y="5513472"/>
+            <a:ext cx="150382" cy="8184"/>
           </a:xfrm>
           <a:prstGeom prst="bentConnector3">
-            <a:avLst/>
+            <a:avLst>
+              <a:gd name="adj1" fmla="val 50000"/>
+            </a:avLst>
           </a:prstGeom>
           <a:ln>
             <a:solidFill>
@@ -4887,7 +4760,7 @@
         </p:nvSpPr>
         <p:spPr>
           <a:xfrm>
-            <a:off x="3934509" y="3773500"/>
+            <a:off x="3838955" y="4998266"/>
             <a:ext cx="2301768" cy="444107"/>
           </a:xfrm>
           <a:prstGeom prst="roundRect">
@@ -4952,7 +4825,7 @@
         </p:nvSpPr>
         <p:spPr>
           <a:xfrm>
-            <a:off x="3274500" y="5206764"/>
+            <a:off x="3169569" y="7337466"/>
             <a:ext cx="1164811" cy="398790"/>
           </a:xfrm>
           <a:prstGeom prst="roundRect">
@@ -5018,7 +4891,7 @@
         </p:nvCxnSpPr>
         <p:spPr>
           <a:xfrm rot="5400000">
-            <a:off x="4297463" y="4421992"/>
+            <a:off x="4192532" y="6552694"/>
             <a:ext cx="344216" cy="1225329"/>
           </a:xfrm>
           <a:prstGeom prst="bentConnector3">
@@ -5068,7 +4941,7 @@
         </p:nvCxnSpPr>
         <p:spPr>
           <a:xfrm rot="5400000">
-            <a:off x="3744182" y="5715506"/>
+            <a:off x="3639251" y="7846208"/>
             <a:ext cx="222676" cy="2772"/>
           </a:xfrm>
           <a:prstGeom prst="bentConnector3">
@@ -5100,6 +4973,436 @@
           </a:fontRef>
         </p:style>
       </p:cxnSp>
+      <p:sp>
+        <p:nvSpPr>
+          <p:cNvPr id="5" name="Rectangle : coins arrondis 4">
+            <a:extLst>
+              <a:ext uri="{FF2B5EF4-FFF2-40B4-BE49-F238E27FC236}">
+                <a16:creationId xmlns:a16="http://schemas.microsoft.com/office/drawing/2014/main" id="{32B41C07-FABE-3FC1-7284-37ACC34D46FC}"/>
+              </a:ext>
+            </a:extLst>
+          </p:cNvPr>
+          <p:cNvSpPr/>
+          <p:nvPr/>
+        </p:nvSpPr>
+        <p:spPr>
+          <a:xfrm>
+            <a:off x="5291787" y="-336136"/>
+            <a:ext cx="1664044" cy="320781"/>
+          </a:xfrm>
+          <a:prstGeom prst="roundRect">
+            <a:avLst/>
+          </a:prstGeom>
+          <a:solidFill>
+            <a:schemeClr val="bg1"/>
+          </a:solidFill>
+          <a:ln>
+            <a:solidFill>
+              <a:schemeClr val="accent2">
+                <a:lumMod val="50000"/>
+              </a:schemeClr>
+            </a:solidFill>
+          </a:ln>
+        </p:spPr>
+        <p:style>
+          <a:lnRef idx="2">
+            <a:schemeClr val="accent1">
+              <a:shade val="15000"/>
+            </a:schemeClr>
+          </a:lnRef>
+          <a:fillRef idx="1">
+            <a:schemeClr val="accent1"/>
+          </a:fillRef>
+          <a:effectRef idx="0">
+            <a:schemeClr val="accent1"/>
+          </a:effectRef>
+          <a:fontRef idx="minor">
+            <a:schemeClr val="lt1"/>
+          </a:fontRef>
+        </p:style>
+        <p:txBody>
+          <a:bodyPr rtlCol="0" anchor="ctr"/>
+          <a:lstStyle/>
+          <a:p>
+            <a:pPr algn="ctr"/>
+            <a:r>
+              <a:rPr lang="en-CA" sz="1200" dirty="0">
+                <a:solidFill>
+                  <a:schemeClr val="tx1"/>
+                </a:solidFill>
+              </a:rPr>
+              <a:t>Upload spatial data</a:t>
+            </a:r>
+          </a:p>
+        </p:txBody>
+      </p:sp>
+      <p:sp>
+        <p:nvSpPr>
+          <p:cNvPr id="21" name="Rectangle : coins arrondis 20">
+            <a:extLst>
+              <a:ext uri="{FF2B5EF4-FFF2-40B4-BE49-F238E27FC236}">
+                <a16:creationId xmlns:a16="http://schemas.microsoft.com/office/drawing/2014/main" id="{B2F5E57B-8838-6990-BD17-ED014915ACD7}"/>
+              </a:ext>
+            </a:extLst>
+          </p:cNvPr>
+          <p:cNvSpPr/>
+          <p:nvPr/>
+        </p:nvSpPr>
+        <p:spPr>
+          <a:xfrm>
+            <a:off x="4431956" y="517334"/>
+            <a:ext cx="1664044" cy="320781"/>
+          </a:xfrm>
+          <a:prstGeom prst="roundRect">
+            <a:avLst/>
+          </a:prstGeom>
+          <a:solidFill>
+            <a:schemeClr val="bg1"/>
+          </a:solidFill>
+          <a:ln>
+            <a:solidFill>
+              <a:schemeClr val="accent2">
+                <a:lumMod val="50000"/>
+              </a:schemeClr>
+            </a:solidFill>
+          </a:ln>
+        </p:spPr>
+        <p:style>
+          <a:lnRef idx="2">
+            <a:schemeClr val="accent1">
+              <a:shade val="15000"/>
+            </a:schemeClr>
+          </a:lnRef>
+          <a:fillRef idx="1">
+            <a:schemeClr val="accent1"/>
+          </a:fillRef>
+          <a:effectRef idx="0">
+            <a:schemeClr val="accent1"/>
+          </a:effectRef>
+          <a:fontRef idx="minor">
+            <a:schemeClr val="lt1"/>
+          </a:fontRef>
+        </p:style>
+        <p:txBody>
+          <a:bodyPr rtlCol="0" anchor="ctr"/>
+          <a:lstStyle/>
+          <a:p>
+            <a:pPr algn="ctr"/>
+            <a:r>
+              <a:rPr lang="en-CA" sz="1200" dirty="0">
+                <a:solidFill>
+                  <a:schemeClr val="tx1"/>
+                </a:solidFill>
+              </a:rPr>
+              <a:t>Study area only</a:t>
+            </a:r>
+          </a:p>
+        </p:txBody>
+      </p:sp>
+      <p:sp>
+        <p:nvSpPr>
+          <p:cNvPr id="23" name="Rectangle : coins arrondis 22">
+            <a:extLst>
+              <a:ext uri="{FF2B5EF4-FFF2-40B4-BE49-F238E27FC236}">
+                <a16:creationId xmlns:a16="http://schemas.microsoft.com/office/drawing/2014/main" id="{7B975180-D011-D9F4-E91E-9624501F25ED}"/>
+              </a:ext>
+            </a:extLst>
+          </p:cNvPr>
+          <p:cNvSpPr/>
+          <p:nvPr/>
+        </p:nvSpPr>
+        <p:spPr>
+          <a:xfrm>
+            <a:off x="7649667" y="517334"/>
+            <a:ext cx="1664044" cy="320781"/>
+          </a:xfrm>
+          <a:prstGeom prst="roundRect">
+            <a:avLst/>
+          </a:prstGeom>
+          <a:solidFill>
+            <a:schemeClr val="bg1"/>
+          </a:solidFill>
+          <a:ln>
+            <a:solidFill>
+              <a:schemeClr val="accent2">
+                <a:lumMod val="50000"/>
+              </a:schemeClr>
+            </a:solidFill>
+          </a:ln>
+        </p:spPr>
+        <p:style>
+          <a:lnRef idx="2">
+            <a:schemeClr val="accent1">
+              <a:shade val="15000"/>
+            </a:schemeClr>
+          </a:lnRef>
+          <a:fillRef idx="1">
+            <a:schemeClr val="accent1"/>
+          </a:fillRef>
+          <a:effectRef idx="0">
+            <a:schemeClr val="accent1"/>
+          </a:effectRef>
+          <a:fontRef idx="minor">
+            <a:schemeClr val="lt1"/>
+          </a:fontRef>
+        </p:style>
+        <p:txBody>
+          <a:bodyPr rtlCol="0" anchor="ctr"/>
+          <a:lstStyle/>
+          <a:p>
+            <a:pPr algn="ctr"/>
+            <a:r>
+              <a:rPr lang="en-CA" sz="1200" dirty="0">
+                <a:solidFill>
+                  <a:schemeClr val="tx1"/>
+                </a:solidFill>
+              </a:rPr>
+              <a:t>Advanced</a:t>
+            </a:r>
+          </a:p>
+        </p:txBody>
+      </p:sp>
+      <p:cxnSp>
+        <p:nvCxnSpPr>
+          <p:cNvPr id="30" name="Connecteur : en angle 29">
+            <a:extLst>
+              <a:ext uri="{FF2B5EF4-FFF2-40B4-BE49-F238E27FC236}">
+                <a16:creationId xmlns:a16="http://schemas.microsoft.com/office/drawing/2014/main" id="{919F273B-2CF8-FA2C-9CBE-178EF888242E}"/>
+              </a:ext>
+            </a:extLst>
+          </p:cNvPr>
+          <p:cNvCxnSpPr>
+            <a:cxnSpLocks/>
+            <a:stCxn id="5" idx="2"/>
+            <a:endCxn id="23" idx="0"/>
+          </p:cNvCxnSpPr>
+          <p:nvPr/>
+        </p:nvCxnSpPr>
+        <p:spPr>
+          <a:xfrm rot="16200000" flipH="1">
+            <a:off x="7036405" y="-927951"/>
+            <a:ext cx="532689" cy="2357880"/>
+          </a:xfrm>
+          <a:prstGeom prst="bentConnector3">
+            <a:avLst>
+              <a:gd name="adj1" fmla="val 50000"/>
+            </a:avLst>
+          </a:prstGeom>
+          <a:ln>
+            <a:solidFill>
+              <a:schemeClr val="accent2">
+                <a:lumMod val="50000"/>
+              </a:schemeClr>
+            </a:solidFill>
+            <a:tailEnd type="triangle"/>
+          </a:ln>
+        </p:spPr>
+        <p:style>
+          <a:lnRef idx="2">
+            <a:schemeClr val="accent1"/>
+          </a:lnRef>
+          <a:fillRef idx="0">
+            <a:schemeClr val="accent1"/>
+          </a:fillRef>
+          <a:effectRef idx="1">
+            <a:schemeClr val="accent1"/>
+          </a:effectRef>
+          <a:fontRef idx="minor">
+            <a:schemeClr val="tx1"/>
+          </a:fontRef>
+        </p:style>
+      </p:cxnSp>
+      <p:cxnSp>
+        <p:nvCxnSpPr>
+          <p:cNvPr id="33" name="Connecteur : en angle 32">
+            <a:extLst>
+              <a:ext uri="{FF2B5EF4-FFF2-40B4-BE49-F238E27FC236}">
+                <a16:creationId xmlns:a16="http://schemas.microsoft.com/office/drawing/2014/main" id="{52C8AD21-C5B8-E66C-6797-D702F5FC9A81}"/>
+              </a:ext>
+            </a:extLst>
+          </p:cNvPr>
+          <p:cNvCxnSpPr>
+            <a:cxnSpLocks/>
+            <a:stCxn id="5" idx="2"/>
+            <a:endCxn id="21" idx="0"/>
+          </p:cNvCxnSpPr>
+          <p:nvPr/>
+        </p:nvCxnSpPr>
+        <p:spPr>
+          <a:xfrm rot="5400000">
+            <a:off x="5427550" y="-178926"/>
+            <a:ext cx="532689" cy="859831"/>
+          </a:xfrm>
+          <a:prstGeom prst="bentConnector3">
+            <a:avLst>
+              <a:gd name="adj1" fmla="val 50000"/>
+            </a:avLst>
+          </a:prstGeom>
+          <a:ln>
+            <a:solidFill>
+              <a:schemeClr val="accent2">
+                <a:lumMod val="50000"/>
+              </a:schemeClr>
+            </a:solidFill>
+            <a:tailEnd type="triangle"/>
+          </a:ln>
+        </p:spPr>
+        <p:style>
+          <a:lnRef idx="2">
+            <a:schemeClr val="accent1"/>
+          </a:lnRef>
+          <a:fillRef idx="0">
+            <a:schemeClr val="accent1"/>
+          </a:fillRef>
+          <a:effectRef idx="1">
+            <a:schemeClr val="accent1"/>
+          </a:effectRef>
+          <a:fontRef idx="minor">
+            <a:schemeClr val="tx1"/>
+          </a:fontRef>
+        </p:style>
+      </p:cxnSp>
+      <p:sp>
+        <p:nvSpPr>
+          <p:cNvPr id="49" name="Rectangle : coins arrondis 48">
+            <a:extLst>
+              <a:ext uri="{FF2B5EF4-FFF2-40B4-BE49-F238E27FC236}">
+                <a16:creationId xmlns:a16="http://schemas.microsoft.com/office/drawing/2014/main" id="{912E7A65-C17B-BA78-8E75-61CC561ADACD}"/>
+              </a:ext>
+            </a:extLst>
+          </p:cNvPr>
+          <p:cNvSpPr/>
+          <p:nvPr/>
+        </p:nvSpPr>
+        <p:spPr>
+          <a:xfrm>
+            <a:off x="4459765" y="1117675"/>
+            <a:ext cx="1664044" cy="805413"/>
+          </a:xfrm>
+          <a:prstGeom prst="roundRect">
+            <a:avLst/>
+          </a:prstGeom>
+          <a:solidFill>
+            <a:schemeClr val="bg1"/>
+          </a:solidFill>
+          <a:ln>
+            <a:solidFill>
+              <a:schemeClr val="accent2">
+                <a:lumMod val="50000"/>
+              </a:schemeClr>
+            </a:solidFill>
+          </a:ln>
+        </p:spPr>
+        <p:style>
+          <a:lnRef idx="2">
+            <a:schemeClr val="accent1">
+              <a:shade val="15000"/>
+            </a:schemeClr>
+          </a:lnRef>
+          <a:fillRef idx="1">
+            <a:schemeClr val="accent1"/>
+          </a:fillRef>
+          <a:effectRef idx="0">
+            <a:schemeClr val="accent1"/>
+          </a:effectRef>
+          <a:fontRef idx="minor">
+            <a:schemeClr val="lt1"/>
+          </a:fontRef>
+        </p:style>
+        <p:txBody>
+          <a:bodyPr rtlCol="0" anchor="ctr"/>
+          <a:lstStyle/>
+          <a:p>
+            <a:pPr algn="ctr"/>
+            <a:r>
+              <a:rPr lang="en-CA" sz="1200" dirty="0">
+                <a:solidFill>
+                  <a:schemeClr val="tx1"/>
+                </a:solidFill>
+              </a:rPr>
+              <a:t>Do you want to reassess study area as study area + upstream of the study area</a:t>
+            </a:r>
+          </a:p>
+        </p:txBody>
+      </p:sp>
+      <p:sp>
+        <p:nvSpPr>
+          <p:cNvPr id="56" name="Rectangle : coins arrondis 55">
+            <a:extLst>
+              <a:ext uri="{FF2B5EF4-FFF2-40B4-BE49-F238E27FC236}">
+                <a16:creationId xmlns:a16="http://schemas.microsoft.com/office/drawing/2014/main" id="{70B55C8D-FBBE-E609-0231-531795F6BA73}"/>
+              </a:ext>
+            </a:extLst>
+          </p:cNvPr>
+          <p:cNvSpPr/>
+          <p:nvPr/>
+        </p:nvSpPr>
+        <p:spPr>
+          <a:xfrm>
+            <a:off x="867001" y="2153371"/>
+            <a:ext cx="2175331" cy="844414"/>
+          </a:xfrm>
+          <a:prstGeom prst="roundRect">
+            <a:avLst/>
+          </a:prstGeom>
+          <a:solidFill>
+            <a:schemeClr val="bg1"/>
+          </a:solidFill>
+          <a:ln>
+            <a:solidFill>
+              <a:schemeClr val="accent2">
+                <a:lumMod val="50000"/>
+              </a:schemeClr>
+            </a:solidFill>
+          </a:ln>
+        </p:spPr>
+        <p:style>
+          <a:lnRef idx="2">
+            <a:schemeClr val="accent1">
+              <a:shade val="15000"/>
+            </a:schemeClr>
+          </a:lnRef>
+          <a:fillRef idx="1">
+            <a:schemeClr val="accent1"/>
+          </a:fillRef>
+          <a:effectRef idx="0">
+            <a:schemeClr val="accent1"/>
+          </a:effectRef>
+          <a:fontRef idx="minor">
+            <a:schemeClr val="lt1"/>
+          </a:fontRef>
+        </p:style>
+        <p:txBody>
+          <a:bodyPr rtlCol="0" anchor="ctr"/>
+          <a:lstStyle/>
+          <a:p>
+            <a:r>
+              <a:rPr lang="en-CA" sz="1200" dirty="0">
+                <a:solidFill>
+                  <a:schemeClr val="tx1"/>
+                </a:solidFill>
+              </a:rPr>
+              <a:t>Upload Disturbance </a:t>
+            </a:r>
+            <a:r>
+              <a:rPr lang="en-CA" sz="1200" dirty="0" err="1">
+                <a:solidFill>
+                  <a:schemeClr val="tx1"/>
+                </a:solidFill>
+              </a:rPr>
+              <a:t>Geopackage</a:t>
+            </a:r>
+            <a:r>
+              <a:rPr lang="en-CA" sz="1200" dirty="0">
+                <a:solidFill>
+                  <a:schemeClr val="tx1"/>
+                </a:solidFill>
+              </a:rPr>
+              <a:t>??</a:t>
+            </a:r>
+          </a:p>
+        </p:txBody>
+      </p:sp>
     </p:spTree>
     <p:extLst>
       <p:ext uri="{BB962C8B-B14F-4D97-AF65-F5344CB8AC3E}">
